--- a/docs/content/quarto/quarto_lecture.pptx
+++ b/docs/content/quarto/quarto_lecture.pptx
@@ -3312,7 +3312,7 @@
             </a:pPr>
             <a:r>
               <a:rPr/>
-              <a:t>Lecture 05 — From Script to Report</a:t>
+              <a:t>Lecture 07 — From Script to Report</a:t>
             </a:r>
           </a:p>
         </p:txBody>
@@ -3373,7 +3373,7 @@
             </a:pPr>
             <a:r>
               <a:rPr/>
-              <a:t>2026-07-05</a:t>
+              <a:t>2026-08-27</a:t>
             </a:r>
           </a:p>
         </p:txBody>
@@ -3449,6 +3449,15 @@
               <a:buNone/>
             </a:pPr>
             <a:r>
+              <a:rPr b="1"/>
+              <a:t>🛑 Do Activity Step 1 now</a:t>
+            </a:r>
+          </a:p>
+          <a:p>
+            <a:pPr lvl="0" indent="0" marL="0">
+              <a:buNone/>
+            </a:pPr>
+            <a:r>
               <a:rPr/>
               <a:t>Open </a:t>
             </a:r>
@@ -5495,7 +5504,7 @@
             </a:pPr>
             <a:r>
               <a:rPr/>
-              <a:t>Where we left off (Lecture 04)</a:t>
+              <a:t>Where we left off (Lectures 05–06)</a:t>
             </a:r>
           </a:p>
         </p:txBody>
@@ -5592,22 +5601,11 @@
             <a:pPr lvl="0"/>
             <a:r>
               <a:rPr b="1"/>
-              <a:t>Welch’s t-test</a:t>
-            </a:r>
-            <a:r>
-              <a:rPr/>
-              <a:t> — shady leaves significantly heavier than sunny</a:t>
-            </a:r>
-          </a:p>
-          <a:p>
-            <a:pPr lvl="0"/>
-            <a:r>
-              <a:rPr b="1"/>
               <a:t>Figures</a:t>
             </a:r>
             <a:r>
               <a:rPr/>
-              <a:t> — boxplots and mean ± SE, saved as PNG</a:t>
+              <a:t> — boxplots and mean ± SE plots, saved as PNG (GGPlot I)</a:t>
             </a:r>
           </a:p>
           <a:p>
@@ -5642,7 +5640,7 @@
             </a:pPr>
             <a:r>
               <a:rPr sz="2000" b="1"/>
-              <a:t>✅ Key idea from Lecture 04</a:t>
+              <a:t>✅ Key idea from Lecture 06</a:t>
             </a:r>
           </a:p>
           <a:p>
@@ -5651,7 +5649,7 @@
             </a:pPr>
             <a:r>
               <a:rPr sz="2000"/>
-              <a:t>You now have a complete analysis and a real result. Today we turn that pile of code into a </a:t>
+              <a:t>You now have a complete descriptive analysis of the leaf data. Today we turn that pile of code into a </a:t>
             </a:r>
             <a:r>
               <a:rPr sz="2000" b="1"/>
@@ -5659,7 +5657,7 @@
             </a:r>
             <a:r>
               <a:rPr sz="2000"/>
-              <a:t>.</a:t>
+              <a:t> — before we even get to formal hypothesis testing.</a:t>
             </a:r>
           </a:p>
         </p:txBody>
@@ -5932,15 +5930,7 @@
             </a:r>
             <a:r>
               <a:rPr sz="2000"/>
-              <a:t>. Learning to </a:t>
-            </a:r>
-            <a:r>
-              <a:rPr sz="2000" i="1"/>
-              <a:t>read</a:t>
-            </a:r>
-            <a:r>
-              <a:rPr sz="2000"/>
-              <a:t> that message is the whole skill. When it happens to you, you’ll go straight to the repeated name.</a:t>
+              <a:t>. Once you know to read the error for the chunk name, you’ll go straight to the repeated label instead of guessing.</a:t>
             </a:r>
           </a:p>
         </p:txBody>
@@ -6011,6 +6001,15 @@
         <p:txBody>
           <a:bodyPr/>
           <a:lstStyle/>
+          <a:p>
+            <a:pPr lvl="0" indent="0" marL="0">
+              <a:buNone/>
+            </a:pPr>
+            <a:r>
+              <a:rPr b="1"/>
+              <a:t>🛑 Do Activity Steps 2–4 now</a:t>
+            </a:r>
+          </a:p>
           <a:p>
             <a:pPr lvl="0" indent="0" marL="0">
               <a:buNone/>
@@ -6835,7 +6834,7 @@
             </a:pPr>
             <a:r>
               <a:rPr sz="2000"/>
-              <a:t>This is the magic of Quarto: your </a:t>
+              <a:t>This is why inline code is worth the syntax: your </a:t>
             </a:r>
             <a:r>
               <a:rPr sz="2000" i="1"/>
@@ -6851,7 +6850,7 @@
             </a:r>
             <a:r>
               <a:rPr sz="2000"/>
-              <a:t>, automatically.</a:t>
+              <a:t> without you retyping a single number.</a:t>
             </a:r>
           </a:p>
         </p:txBody>
@@ -6978,6 +6977,15 @@
               <a:buNone/>
             </a:pPr>
             <a:r>
+              <a:rPr b="1"/>
+              <a:t>🛑 Do Activity Step 5 now</a:t>
+            </a:r>
+          </a:p>
+          <a:p>
+            <a:pPr lvl="0" indent="0" marL="0">
+              <a:buNone/>
+            </a:pPr>
+            <a:r>
               <a:rPr/>
               <a:t>Compute a group mean, then insert it into a sentence with inline code. Predict the number that will appear before you Render.</a:t>
             </a:r>
@@ -8663,6 +8671,15 @@
               <a:buNone/>
             </a:pPr>
             <a:r>
+              <a:rPr b="1"/>
+              <a:t>🛑 Do Activity Steps 6–7 now</a:t>
+            </a:r>
+          </a:p>
+          <a:p>
+            <a:pPr lvl="0" indent="0" marL="0">
+              <a:buNone/>
+            </a:pPr>
+            <a:r>
               <a:rPr/>
               <a:t>Upgrade the YAML for a TOC and numbered sections, copy in the template’s table and figure, then render to Word, HTML, and PowerPoint.</a:t>
             </a:r>
@@ -8876,7 +8893,7 @@
             </a:pPr>
             <a:r>
               <a:rPr sz="2000"/>
-              <a:t>Open the activity template, drop in your Lecture 04 t-test, and render it to Word.</a:t>
+              <a:t>Open the activity template, drop in your Lecture 06 summary statistics, and render it to Word.</a:t>
             </a:r>
           </a:p>
         </p:txBody>
@@ -8927,7 +8944,7 @@
             </a:r>
             <a:r>
               <a:rPr sz="2000"/>
-              <a:t>. From here on, every analysis can be a document that rebuilds itself.</a:t>
+              <a:t>. From here on, every analysis can be a document that rebuilds itself — including the t-test you’ll run in Lecture 09.</a:t>
             </a:r>
           </a:p>
           <a:p>
@@ -8936,20 +8953,14 @@
             </a:pPr>
             <a:r>
               <a:rPr b="1"/>
-              <a:t>Up next — Lecture 06:</a:t>
+              <a:t>Up next — Lecture 08 (Flex/Catch-up), then Lecture 09:</a:t>
             </a:r>
           </a:p>
           <a:p>
             <a:pPr lvl="0"/>
             <a:r>
               <a:rPr/>
-              <a:t>Linear regression with </a:t>
-            </a:r>
-            <a:r>
-              <a:rPr>
-                <a:latin typeface="Courier"/>
-              </a:rPr>
-              <a:t>lm()</a:t>
+              <a:t>The two-sample t-test — formally testing our leaf hypothesis</a:t>
             </a:r>
           </a:p>
           <a:p>
@@ -10252,7 +10263,7 @@
             </a:pPr>
             <a:r>
               <a:rPr sz="2000"/>
-              <a:t>Imagine a reviewer finds one bad leaf measurement. With Quarto the fix is: delete the row, press Render. Done.</a:t>
+              <a:t>Imagine a reviewer finds one bad leaf measurement. With Quarto the fix is: delete the row, then press Render — every table, figure, and sentence downstream updates to match.</a:t>
             </a:r>
           </a:p>
         </p:txBody>
@@ -10273,7 +10284,7 @@
         </p:blipFill>
         <p:spPr bwMode="auto">
           <a:xfrm>
-            <a:off x="4495800" y="1308100"/>
+            <a:off x="4495800" y="1054100"/>
             <a:ext cx="4406900" cy="2514600"/>
           </a:xfrm>
           <a:prstGeom prst="rect">
@@ -10287,6 +10298,80 @@
           </a:ln>
         </p:spPr>
       </p:pic>
+      <p:sp>
+        <p:nvSpPr>
+          <p:cNvPr id="1" name="TextBox 3"/>
+          <p:cNvSpPr txBox="1"/>
+          <p:nvPr>
+            <p:ph idx="1"/>
+          </p:nvPr>
+        </p:nvSpPr>
+        <p:spPr>
+          <a:xfrm>
+            <a:off x="4495800" y="3962400"/>
+            <a:ext cx="4406900" cy="508000"/>
+          </a:xfrm>
+          <a:prstGeom prst="rect">
+            <a:avLst/>
+          </a:prstGeom>
+          <a:noFill/>
+        </p:spPr>
+        <p:txBody>
+          <a:bodyPr/>
+          <a:lstStyle/>
+          <a:p>
+            <a:pPr lvl="0" indent="0" marL="0" algn="ctr">
+              <a:buNone/>
+            </a:pPr>
+            <a:r>
+              <a:rPr/>
+              <a:t>Diagram of the pipe operator: tree_df flows down into filter(side == “sunny”), then flows down into summary(), read as “take tree_df, then filter, then summarise.”</a:t>
+            </a:r>
+          </a:p>
+        </p:txBody>
+      </p:sp>
+      <p:sp>
+        <p:nvSpPr>
+          <p:cNvPr id="4" name="Content Placeholder 3"/>
+          <p:cNvSpPr>
+            <a:spLocks noGrp="1"/>
+          </p:cNvSpPr>
+          <p:nvPr>
+            <p:ph idx="2" sz="half"/>
+          </p:nvPr>
+        </p:nvSpPr>
+        <p:spPr/>
+        <p:txBody>
+          <a:bodyPr/>
+          <a:lstStyle/>
+          <a:p>
+            <a:pPr lvl="0" indent="0" marL="1270000">
+              <a:buNone/>
+            </a:pPr>
+            <a:r>
+              <a:rPr sz="2000" b="1"/>
+              <a:t>Note</a:t>
+            </a:r>
+          </a:p>
+          <a:p>
+            <a:pPr lvl="0" indent="0" marL="1270000">
+              <a:buNone/>
+            </a:pPr>
+            <a:r>
+              <a:rPr sz="2000"/>
+              <a:t>Same philosophy as Lecture 02: </a:t>
+            </a:r>
+            <a:r>
+              <a:rPr sz="2000" b="1"/>
+              <a:t>never overwrite your raw numbers</a:t>
+            </a:r>
+            <a:r>
+              <a:rPr sz="2000"/>
+              <a:t> — let the document rebuild from them.</a:t>
+            </a:r>
+          </a:p>
+        </p:txBody>
+      </p:sp>
     </p:spTree>
   </p:cSld>
 </p:sld>

--- a/docs/content/quarto/quarto_lecture.pptx
+++ b/docs/content/quarto/quarto_lecture.pptx
@@ -3373,7 +3373,7 @@
             </a:pPr>
             <a:r>
               <a:rPr/>
-              <a:t>2026-08-27</a:t>
+              <a:t>2026-09-01</a:t>
             </a:r>
           </a:p>
         </p:txBody>

--- a/docs/content/quarto/quarto_lecture.pptx
+++ b/docs/content/quarto/quarto_lecture.pptx
@@ -3373,7 +3373,7 @@
             </a:pPr>
             <a:r>
               <a:rPr/>
-              <a:t>2026-09-01</a:t>
+              <a:t>2026-09-03</a:t>
             </a:r>
           </a:p>
         </p:txBody>

--- a/docs/content/quarto/quarto_lecture.pptx
+++ b/docs/content/quarto/quarto_lecture.pptx
@@ -3373,7 +3373,7 @@
             </a:pPr>
             <a:r>
               <a:rPr/>
-              <a:t>2026-09-03</a:t>
+              <a:t>2026-09-04</a:t>
             </a:r>
           </a:p>
         </p:txBody>
